--- a/Slides/Module-19-Capstone-Project-2.pptx
+++ b/Slides/Module-19-Capstone-Project-2.pptx
@@ -113,7 +113,7 @@
   <p:extLst>
     <p:ext uri="{521415D9-36F7-43E2-AB2F-B90AF26B5E84}">
       <p14:sectionLst xmlns:p14="http://schemas.microsoft.com/office/powerpoint/2010/main">
-        <p14:section name="Module 19" id="{5bc764f1-5902-bd2c-b03a-0fd3ecd501fe}">
+        <p14:section name="Module 19" id="{421a3fad-e0dc-8f95-286b-66be4f84279a}">
           <p14:sldIdLst>
             <p14:sldId id="256"/>
             <p14:sldId id="257"/>
@@ -3214,7 +3214,7 @@
                 <a:ea typeface="Consolas" pitchFamily="34" charset="-122"/>
                 <a:cs typeface="Consolas" pitchFamily="34" charset="-120"/>
               </a:rPr>
-              <a:t>└── ui/          the menu (and optional Swing window)     (the ONLY talker)</a:t>
+              <a:t>└── ui/          the menu (and optional JavaFX window)    (the ONLY talker)</a:t>
             </a:r>
             <a:endParaRPr lang="en-US" sz="1600" dirty="0"/>
           </a:p>
